--- a/outputs/ophthalmology-batch-20261011/pediatric/A4_color_editable.pptx
+++ b/outputs/ophthalmology-batch-20261011/pediatric/A4_color_editable.pptx
@@ -631,7 +631,7 @@
           <a:p/>
           <a:p>
             <a:r>
-              <a:t>pediatric-09 心率降幅&gt;50%：立即移除斜视钩并暂停；未恢复增强局麻，再无效静推阿托品0.1~0.3 mg，心率正常后继续；由麻醉/心内医师处理。</a:t>
+              <a:t>pediatric-09 心率降幅&gt;50%：立即移除斜视钩并暂停；未恢复增强局麻，再无效静推阿托品0.1~0.3 mg，心率恢复正常后继续；由麻醉/心内医师处理。</a:t>
             </a:r>
           </a:p>
           <a:p>
@@ -759,7 +759,7 @@
           <a:p/>
           <a:p>
             <a:r>
-              <a:t>pediatric-14 外斜术后过矫：伴复视可1~4周交替遮盖；4周仍内斜 → 麻痹验光、远视足矫/必要棱镜，高AC/A双光。连续内斜&gt;6月等情况考虑二次手术/肉毒毒素。</a:t>
+              <a:t>pediatric-14 外斜术后过矫：伴复视可1~4周交替遮盖；4周仍内斜 → 睫状肌麻痹验光、远视足矫/必要棱镜，高AC/A双光。连续内斜&gt;6月等情况考虑二次手术/肉毒毒素。</a:t>
             </a:r>
           </a:p>
           <a:p>
@@ -775,7 +775,7 @@
           <a:p/>
           <a:p>
             <a:r>
-              <a:t>pediatric-15 欠矫处理：外斜欠矫足矫近视/屈光参差、视功能训练；控制好观察，控制差可术后6周二次手术。内斜欠矫麻痹验光、远视足矫/双光及治弱视。</a:t>
+              <a:t>pediatric-15 欠矫处理：外斜欠矫足矫近视/屈光参差、视功能训练；控制好观察，控制差可术后6周二次手术。内斜欠矫睫状肌麻痹验光、远视足矫/双光及治弱视。</a:t>
             </a:r>
           </a:p>
           <a:p>
@@ -823,7 +823,7 @@
           <a:p/>
           <a:p>
             <a:r>
-              <a:t>pediatric-18 肌肉滑脱识别：术后眼位异常、运动受限、扫视减慢应疑滑脱；MRI/回弹试验辅助，术探透见试验阳性确诊；二次寻找实体肌并重固定。</a:t>
+              <a:t>pediatric-18 肌肉滑脱识别：术后眼位异常、运动受限、扫视减慢应疑滑脱；MRI/回弹试验辅助，术中探查透见试验阳性可确诊；二次寻找实体肌并重固定。</a:t>
             </a:r>
           </a:p>
           <a:p>
@@ -4514,7 +4514,7 @@
       </p:sp>
       <p:sp>
         <p:nvSpPr>
-          <p:cNvPr id="15" name="心率降&lt;20%观察；20%~50%稳定按轻度、不稳按重度；&gt;50%移钩暂停，由麻醉/心内处理。"/>
+          <p:cNvPr id="15" name="心率较基线降幅&lt;20%观察；20%~50%稳定按轻度、不稳按重度；&gt;50%移钩暂停，由麻醉/心内处理"/>
           <p:cNvSpPr txBox="1"/>
           <p:nvPr/>
         </p:nvSpPr>
@@ -4554,7 +4554,7 @@
                 <a:ea typeface="Microsoft YaHei"/>
                 <a:cs typeface="Microsoft YaHei"/>
               </a:rPr>
-              <a:t>心率降&lt;20%观察；20%~50%稳定按轻度、不稳按重度；</a:t>
+              <a:t>心率较基线降幅&lt;20%观察；20%~50%稳定按轻度、不稳按</a:t>
             </a:r>
           </a:p>
           <a:p>
@@ -4578,7 +4578,7 @@
                 <a:ea typeface="Microsoft YaHei"/>
                 <a:cs typeface="Microsoft YaHei"/>
               </a:rPr>
-              <a:t>&gt;50%移钩暂停，由麻醉/心内处理。</a:t>
+              <a:t>重度；&gt;50%移钩暂停，由麻醉/心内处理。</a:t>
             </a:r>
           </a:p>
         </p:txBody>
@@ -4724,7 +4724,7 @@
       </p:sp>
       <p:sp>
         <p:nvSpPr>
-          <p:cNvPr id="19" name="暂停后未恢复→增强局麻；仍无效静推阿托品0.1~0.3 mg，正常后继续。勿外推为通用儿童急救剂量。"/>
+          <p:cNvPr id="19" name="暂停后未恢复→增强局麻；仍无效静推阿托品0.1~0.3 mg，心率恢复正常后继续。勿外推为通用儿童急"/>
           <p:cNvSpPr txBox="1"/>
           <p:nvPr/>
         </p:nvSpPr>
@@ -4788,7 +4788,7 @@
                 <a:ea typeface="Microsoft YaHei"/>
                 <a:cs typeface="Microsoft YaHei"/>
               </a:rPr>
-              <a:t>正常后继续。勿外推为通用儿童急救剂量。</a:t>
+              <a:t>心率恢复正常后继续。勿外推为通用儿童急救剂量。</a:t>
             </a:r>
           </a:p>
         </p:txBody>
@@ -5562,7 +5562,7 @@
       </p:sp>
       <p:sp>
         <p:nvSpPr>
-          <p:cNvPr id="35" name="心率降&lt;20%观察；20%~50%稳定按轻度、不稳按重度；&gt;50%移钩暂停，由麻醉/心内处理。"/>
+          <p:cNvPr id="35" name="心率较基线降幅&lt;20%观察；20%~50%稳定按轻度、不稳按重度；&gt;50%移钩暂停，由麻醉/心内处理"/>
           <p:cNvSpPr txBox="1"/>
           <p:nvPr/>
         </p:nvSpPr>
@@ -5602,7 +5602,7 @@
                 <a:ea typeface="Microsoft YaHei"/>
                 <a:cs typeface="Microsoft YaHei"/>
               </a:rPr>
-              <a:t>心率降&lt;20%观察；20%~50%稳定按轻度、不稳按重度；</a:t>
+              <a:t>心率较基线降幅&lt;20%观察；20%~50%稳定按轻度、不稳按</a:t>
             </a:r>
           </a:p>
           <a:p>
@@ -5626,7 +5626,7 @@
                 <a:ea typeface="Microsoft YaHei"/>
                 <a:cs typeface="Microsoft YaHei"/>
               </a:rPr>
-              <a:t>&gt;50%移钩暂停，由麻醉/心内处理。</a:t>
+              <a:t>重度；&gt;50%移钩暂停，由麻醉/心内处理。</a:t>
             </a:r>
           </a:p>
         </p:txBody>
@@ -5772,7 +5772,7 @@
       </p:sp>
       <p:sp>
         <p:nvSpPr>
-          <p:cNvPr id="39" name="暂停后未恢复→增强局麻；仍无效静推阿托品0.1~0.3 mg，正常后继续。勿外推为通用儿童急救剂量。"/>
+          <p:cNvPr id="39" name="暂停后未恢复→增强局麻；仍无效静推阿托品0.1~0.3 mg，心率恢复正常后继续。勿外推为通用儿童急"/>
           <p:cNvSpPr txBox="1"/>
           <p:nvPr/>
         </p:nvSpPr>
@@ -5836,7 +5836,7 @@
                 <a:ea typeface="Microsoft YaHei"/>
                 <a:cs typeface="Microsoft YaHei"/>
               </a:rPr>
-              <a:t>正常后继续。勿外推为通用儿童急救剂量。</a:t>
+              <a:t>心率恢复正常后继续。勿外推为通用儿童急救剂量。</a:t>
             </a:r>
           </a:p>
         </p:txBody>
@@ -6610,7 +6610,7 @@
       </p:sp>
       <p:sp>
         <p:nvSpPr>
-          <p:cNvPr id="55" name="心率降&lt;20%观察；20%~50%稳定按轻度、不稳按重度；&gt;50%移钩暂停，由麻醉/心内处理。"/>
+          <p:cNvPr id="55" name="心率较基线降幅&lt;20%观察；20%~50%稳定按轻度、不稳按重度；&gt;50%移钩暂停，由麻醉/心内处理"/>
           <p:cNvSpPr txBox="1"/>
           <p:nvPr/>
         </p:nvSpPr>
@@ -6650,7 +6650,7 @@
                 <a:ea typeface="Microsoft YaHei"/>
                 <a:cs typeface="Microsoft YaHei"/>
               </a:rPr>
-              <a:t>心率降&lt;20%观察；20%~50%稳定按轻度、不稳按重度；</a:t>
+              <a:t>心率较基线降幅&lt;20%观察；20%~50%稳定按轻度、不稳按</a:t>
             </a:r>
           </a:p>
           <a:p>
@@ -6674,7 +6674,7 @@
                 <a:ea typeface="Microsoft YaHei"/>
                 <a:cs typeface="Microsoft YaHei"/>
               </a:rPr>
-              <a:t>&gt;50%移钩暂停，由麻醉/心内处理。</a:t>
+              <a:t>重度；&gt;50%移钩暂停，由麻醉/心内处理。</a:t>
             </a:r>
           </a:p>
         </p:txBody>
@@ -6820,7 +6820,7 @@
       </p:sp>
       <p:sp>
         <p:nvSpPr>
-          <p:cNvPr id="59" name="暂停后未恢复→增强局麻；仍无效静推阿托品0.1~0.3 mg，正常后继续。勿外推为通用儿童急救剂量。"/>
+          <p:cNvPr id="59" name="暂停后未恢复→增强局麻；仍无效静推阿托品0.1~0.3 mg，心率恢复正常后继续。勿外推为通用儿童急"/>
           <p:cNvSpPr txBox="1"/>
           <p:nvPr/>
         </p:nvSpPr>
@@ -6884,7 +6884,7 @@
                 <a:ea typeface="Microsoft YaHei"/>
                 <a:cs typeface="Microsoft YaHei"/>
               </a:rPr>
-              <a:t>正常后继续。勿外推为通用儿童急救剂量。</a:t>
+              <a:t>心率恢复正常后继续。勿外推为通用儿童急救剂量。</a:t>
             </a:r>
           </a:p>
         </p:txBody>
@@ -7658,7 +7658,7 @@
       </p:sp>
       <p:sp>
         <p:nvSpPr>
-          <p:cNvPr id="75" name="心率降&lt;20%观察；20%~50%稳定按轻度、不稳按重度；&gt;50%移钩暂停，由麻醉/心内处理。"/>
+          <p:cNvPr id="75" name="心率较基线降幅&lt;20%观察；20%~50%稳定按轻度、不稳按重度；&gt;50%移钩暂停，由麻醉/心内处理"/>
           <p:cNvSpPr txBox="1"/>
           <p:nvPr/>
         </p:nvSpPr>
@@ -7698,7 +7698,7 @@
                 <a:ea typeface="Microsoft YaHei"/>
                 <a:cs typeface="Microsoft YaHei"/>
               </a:rPr>
-              <a:t>心率降&lt;20%观察；20%~50%稳定按轻度、不稳按重度；</a:t>
+              <a:t>心率较基线降幅&lt;20%观察；20%~50%稳定按轻度、不稳按</a:t>
             </a:r>
           </a:p>
           <a:p>
@@ -7722,7 +7722,7 @@
                 <a:ea typeface="Microsoft YaHei"/>
                 <a:cs typeface="Microsoft YaHei"/>
               </a:rPr>
-              <a:t>&gt;50%移钩暂停，由麻醉/心内处理。</a:t>
+              <a:t>重度；&gt;50%移钩暂停，由麻醉/心内处理。</a:t>
             </a:r>
           </a:p>
         </p:txBody>
@@ -7868,7 +7868,7 @@
       </p:sp>
       <p:sp>
         <p:nvSpPr>
-          <p:cNvPr id="79" name="暂停后未恢复→增强局麻；仍无效静推阿托品0.1~0.3 mg，正常后继续。勿外推为通用儿童急救剂量。"/>
+          <p:cNvPr id="79" name="暂停后未恢复→增强局麻；仍无效静推阿托品0.1~0.3 mg，心率恢复正常后继续。勿外推为通用儿童急"/>
           <p:cNvSpPr txBox="1"/>
           <p:nvPr/>
         </p:nvSpPr>
@@ -7932,7 +7932,7 @@
                 <a:ea typeface="Microsoft YaHei"/>
                 <a:cs typeface="Microsoft YaHei"/>
               </a:rPr>
-              <a:t>正常后继续。勿外推为通用儿童急救剂量。</a:t>
+              <a:t>心率恢复正常后继续。勿外推为通用儿童急救剂量。</a:t>
             </a:r>
           </a:p>
         </p:txBody>
@@ -8686,7 +8686,7 @@
       </p:sp>
       <p:sp>
         <p:nvSpPr>
-          <p:cNvPr id="11" name="1天、1周、1/3/6月，后每半年；视力、屈光、眼位/运动、头位/双眼视；早期眼压/前节。"/>
+          <p:cNvPr id="11" name="1天、1周、第1、3、6个月，后每半年；视力、屈光、眼位/运动、头位/双眼视；早期眼压/前节。"/>
           <p:cNvSpPr txBox="1"/>
           <p:nvPr/>
         </p:nvSpPr>
@@ -8726,7 +8726,7 @@
                 <a:ea typeface="Microsoft YaHei"/>
                 <a:cs typeface="Microsoft YaHei"/>
               </a:rPr>
-              <a:t>1天、1周、1/3/6月，后每半年；视力、屈光、眼位/运动、</a:t>
+              <a:t>1天、1周、第1、3、6个月，后每半年；视力、屈光、眼位/</a:t>
             </a:r>
           </a:p>
           <a:p>
@@ -8750,7 +8750,7 @@
                 <a:ea typeface="Microsoft YaHei"/>
                 <a:cs typeface="Microsoft YaHei"/>
               </a:rPr>
-              <a:t>头位/双眼视；早期眼压/前节。</a:t>
+              <a:t>运动、头位/双眼视；早期眼压/前节。</a:t>
             </a:r>
           </a:p>
         </p:txBody>
@@ -9758,7 +9758,7 @@
       </p:sp>
       <p:sp>
         <p:nvSpPr>
-          <p:cNvPr id="31" name="1天、1周、1/3/6月，后每半年；视力、屈光、眼位/运动、头位/双眼视；早期眼压/前节。"/>
+          <p:cNvPr id="31" name="1天、1周、第1、3、6个月，后每半年；视力、屈光、眼位/运动、头位/双眼视；早期眼压/前节。"/>
           <p:cNvSpPr txBox="1"/>
           <p:nvPr/>
         </p:nvSpPr>
@@ -9798,7 +9798,7 @@
                 <a:ea typeface="Microsoft YaHei"/>
                 <a:cs typeface="Microsoft YaHei"/>
               </a:rPr>
-              <a:t>1天、1周、1/3/6月，后每半年；视力、屈光、眼位/运动、</a:t>
+              <a:t>1天、1周、第1、3、6个月，后每半年；视力、屈光、眼位/</a:t>
             </a:r>
           </a:p>
           <a:p>
@@ -9822,7 +9822,7 @@
                 <a:ea typeface="Microsoft YaHei"/>
                 <a:cs typeface="Microsoft YaHei"/>
               </a:rPr>
-              <a:t>头位/双眼视；早期眼压/前节。</a:t>
+              <a:t>运动、头位/双眼视；早期眼压/前节。</a:t>
             </a:r>
           </a:p>
         </p:txBody>
@@ -10830,7 +10830,7 @@
       </p:sp>
       <p:sp>
         <p:nvSpPr>
-          <p:cNvPr id="51" name="1天、1周、1/3/6月，后每半年；视力、屈光、眼位/运动、头位/双眼视；早期眼压/前节。"/>
+          <p:cNvPr id="51" name="1天、1周、第1、3、6个月，后每半年；视力、屈光、眼位/运动、头位/双眼视；早期眼压/前节。"/>
           <p:cNvSpPr txBox="1"/>
           <p:nvPr/>
         </p:nvSpPr>
@@ -10870,7 +10870,7 @@
                 <a:ea typeface="Microsoft YaHei"/>
                 <a:cs typeface="Microsoft YaHei"/>
               </a:rPr>
-              <a:t>1天、1周、1/3/6月，后每半年；视力、屈光、眼位/运动、</a:t>
+              <a:t>1天、1周、第1、3、6个月，后每半年；视力、屈光、眼位/</a:t>
             </a:r>
           </a:p>
           <a:p>
@@ -10894,7 +10894,7 @@
                 <a:ea typeface="Microsoft YaHei"/>
                 <a:cs typeface="Microsoft YaHei"/>
               </a:rPr>
-              <a:t>头位/双眼视；早期眼压/前节。</a:t>
+              <a:t>运动、头位/双眼视；早期眼压/前节。</a:t>
             </a:r>
           </a:p>
         </p:txBody>
@@ -11902,7 +11902,7 @@
       </p:sp>
       <p:sp>
         <p:nvSpPr>
-          <p:cNvPr id="71" name="1天、1周、1/3/6月，后每半年；视力、屈光、眼位/运动、头位/双眼视；早期眼压/前节。"/>
+          <p:cNvPr id="71" name="1天、1周、第1、3、6个月，后每半年；视力、屈光、眼位/运动、头位/双眼视；早期眼压/前节。"/>
           <p:cNvSpPr txBox="1"/>
           <p:nvPr/>
         </p:nvSpPr>
@@ -11942,7 +11942,7 @@
                 <a:ea typeface="Microsoft YaHei"/>
                 <a:cs typeface="Microsoft YaHei"/>
               </a:rPr>
-              <a:t>1天、1周、1/3/6月，后每半年；视力、屈光、眼位/运动、</a:t>
+              <a:t>1天、1周、第1、3、6个月，后每半年；视力、屈光、眼位/</a:t>
             </a:r>
           </a:p>
           <a:p>
@@ -11966,7 +11966,7 @@
                 <a:ea typeface="Microsoft YaHei"/>
                 <a:cs typeface="Microsoft YaHei"/>
               </a:rPr>
-              <a:t>头位/双眼视；早期眼压/前节。</a:t>
+              <a:t>运动、头位/双眼视；早期眼压/前节。</a:t>
             </a:r>
           </a:p>
         </p:txBody>
